--- a/images/research_path.pptx
+++ b/images/research_path.pptx
@@ -3479,7 +3479,7 @@
               <a:rPr lang="en-US" b="1" dirty="0">
                 <a:latin typeface="Caveat" pitchFamily="2" charset="0"/>
               </a:rPr>
-              <a:t>Video understanding</a:t>
+              <a:t>Video Understanding</a:t>
             </a:r>
           </a:p>
         </p:txBody>

--- a/images/research_path.pptx
+++ b/images/research_path.pptx
@@ -104,6 +104,11 @@
       </a:defRPr>
     </a:lvl9pPr>
   </p:defaultTextStyle>
+  <p:extLst>
+    <p:ext uri="{EFAFB233-063F-42B5-8137-9DF3F51BA10A}">
+      <p15:sldGuideLst xmlns:p15="http://schemas.microsoft.com/office/powerpoint/2012/main"/>
+    </p:ext>
+  </p:extLst>
 </p:presentation>
 </file>
 
@@ -254,7 +259,7 @@
           <a:p>
             <a:fld id="{60BB05F0-9587-7F47-83BA-F627342936F2}" type="datetimeFigureOut">
               <a:rPr lang="en-US" smtClean="0"/>
-              <a:t>3/22/26</a:t>
+              <a:t>3/30/26</a:t>
             </a:fld>
             <a:endParaRPr lang="en-US"/>
           </a:p>
@@ -452,7 +457,7 @@
           <a:p>
             <a:fld id="{60BB05F0-9587-7F47-83BA-F627342936F2}" type="datetimeFigureOut">
               <a:rPr lang="en-US" smtClean="0"/>
-              <a:t>3/22/26</a:t>
+              <a:t>3/30/26</a:t>
             </a:fld>
             <a:endParaRPr lang="en-US"/>
           </a:p>
@@ -660,7 +665,7 @@
           <a:p>
             <a:fld id="{60BB05F0-9587-7F47-83BA-F627342936F2}" type="datetimeFigureOut">
               <a:rPr lang="en-US" smtClean="0"/>
-              <a:t>3/22/26</a:t>
+              <a:t>3/30/26</a:t>
             </a:fld>
             <a:endParaRPr lang="en-US"/>
           </a:p>
@@ -858,7 +863,7 @@
           <a:p>
             <a:fld id="{60BB05F0-9587-7F47-83BA-F627342936F2}" type="datetimeFigureOut">
               <a:rPr lang="en-US" smtClean="0"/>
-              <a:t>3/22/26</a:t>
+              <a:t>3/30/26</a:t>
             </a:fld>
             <a:endParaRPr lang="en-US"/>
           </a:p>
@@ -1133,7 +1138,7 @@
           <a:p>
             <a:fld id="{60BB05F0-9587-7F47-83BA-F627342936F2}" type="datetimeFigureOut">
               <a:rPr lang="en-US" smtClean="0"/>
-              <a:t>3/22/26</a:t>
+              <a:t>3/30/26</a:t>
             </a:fld>
             <a:endParaRPr lang="en-US"/>
           </a:p>
@@ -1398,7 +1403,7 @@
           <a:p>
             <a:fld id="{60BB05F0-9587-7F47-83BA-F627342936F2}" type="datetimeFigureOut">
               <a:rPr lang="en-US" smtClean="0"/>
-              <a:t>3/22/26</a:t>
+              <a:t>3/30/26</a:t>
             </a:fld>
             <a:endParaRPr lang="en-US"/>
           </a:p>
@@ -1810,7 +1815,7 @@
           <a:p>
             <a:fld id="{60BB05F0-9587-7F47-83BA-F627342936F2}" type="datetimeFigureOut">
               <a:rPr lang="en-US" smtClean="0"/>
-              <a:t>3/22/26</a:t>
+              <a:t>3/30/26</a:t>
             </a:fld>
             <a:endParaRPr lang="en-US"/>
           </a:p>
@@ -1951,7 +1956,7 @@
           <a:p>
             <a:fld id="{60BB05F0-9587-7F47-83BA-F627342936F2}" type="datetimeFigureOut">
               <a:rPr lang="en-US" smtClean="0"/>
-              <a:t>3/22/26</a:t>
+              <a:t>3/30/26</a:t>
             </a:fld>
             <a:endParaRPr lang="en-US"/>
           </a:p>
@@ -2064,7 +2069,7 @@
           <a:p>
             <a:fld id="{60BB05F0-9587-7F47-83BA-F627342936F2}" type="datetimeFigureOut">
               <a:rPr lang="en-US" smtClean="0"/>
-              <a:t>3/22/26</a:t>
+              <a:t>3/30/26</a:t>
             </a:fld>
             <a:endParaRPr lang="en-US"/>
           </a:p>
@@ -2375,7 +2380,7 @@
           <a:p>
             <a:fld id="{60BB05F0-9587-7F47-83BA-F627342936F2}" type="datetimeFigureOut">
               <a:rPr lang="en-US" smtClean="0"/>
-              <a:t>3/22/26</a:t>
+              <a:t>3/30/26</a:t>
             </a:fld>
             <a:endParaRPr lang="en-US"/>
           </a:p>
@@ -2663,7 +2668,7 @@
           <a:p>
             <a:fld id="{60BB05F0-9587-7F47-83BA-F627342936F2}" type="datetimeFigureOut">
               <a:rPr lang="en-US" smtClean="0"/>
-              <a:t>3/22/26</a:t>
+              <a:t>3/30/26</a:t>
             </a:fld>
             <a:endParaRPr lang="en-US"/>
           </a:p>
@@ -2904,7 +2909,7 @@
           <a:p>
             <a:fld id="{60BB05F0-9587-7F47-83BA-F627342936F2}" type="datetimeFigureOut">
               <a:rPr lang="en-US" smtClean="0"/>
-              <a:t>3/22/26</a:t>
+              <a:t>3/30/26</a:t>
             </a:fld>
             <a:endParaRPr lang="en-US"/>
           </a:p>
@@ -3377,7 +3382,7 @@
           <a:lstStyle/>
           <a:p>
             <a:pPr algn="ctr"/>
-            <a:endParaRPr lang="en-US" b="1" dirty="0">
+            <a:endParaRPr lang="en-US" dirty="0">
               <a:solidFill>
                 <a:schemeClr val="tx1"/>
               </a:solidFill>
@@ -3440,7 +3445,7 @@
           <a:lstStyle/>
           <a:p>
             <a:pPr algn="ctr"/>
-            <a:endParaRPr lang="en-US" b="1">
+            <a:endParaRPr lang="en-US">
               <a:latin typeface="Caveat" pitchFamily="2" charset="0"/>
             </a:endParaRPr>
           </a:p>
@@ -3476,7 +3481,7 @@
           <a:p>
             <a:pPr algn="ctr"/>
             <a:r>
-              <a:rPr lang="en-US" b="1" dirty="0">
+              <a:rPr lang="en-US" dirty="0">
                 <a:latin typeface="Caveat" pitchFamily="2" charset="0"/>
               </a:rPr>
               <a:t>Video Understanding</a:t>
@@ -3513,7 +3518,7 @@
           <a:lstStyle/>
           <a:p>
             <a:r>
-              <a:rPr lang="en-US" b="1" dirty="0">
+              <a:rPr lang="en-US" dirty="0">
                 <a:latin typeface="Caveat" pitchFamily="2" charset="0"/>
               </a:rPr>
               <a:t>Vision/Language Modeling</a:t>
@@ -3535,8 +3540,8 @@
         </p:nvSpPr>
         <p:spPr>
           <a:xfrm>
-            <a:off x="924119" y="3367874"/>
-            <a:ext cx="2278894" cy="369332"/>
+            <a:off x="1478677" y="3367874"/>
+            <a:ext cx="1717330" cy="307777"/>
           </a:xfrm>
           <a:prstGeom prst="rect">
             <a:avLst/>
@@ -3550,7 +3555,7 @@
           <a:lstStyle/>
           <a:p>
             <a:r>
-              <a:rPr lang="en-US" b="1" dirty="0">
+              <a:rPr lang="en-US" sz="1400" dirty="0">
                 <a:latin typeface="Gisha" panose="020B0502040204020203" pitchFamily="34" charset="-79"/>
                 <a:cs typeface="Gisha" panose="020B0502040204020203" pitchFamily="34" charset="-79"/>
               </a:rPr>
@@ -3573,8 +3578,8 @@
         </p:nvSpPr>
         <p:spPr>
           <a:xfrm>
-            <a:off x="1183087" y="3721433"/>
-            <a:ext cx="2016001" cy="369332"/>
+            <a:off x="1682259" y="3721433"/>
+            <a:ext cx="1513748" cy="307777"/>
           </a:xfrm>
           <a:prstGeom prst="rect">
             <a:avLst/>
@@ -3588,7 +3593,7 @@
           <a:lstStyle/>
           <a:p>
             <a:r>
-              <a:rPr lang="en-US" b="1" dirty="0">
+              <a:rPr lang="en-US" sz="1400" dirty="0">
                 <a:latin typeface="Gisha" panose="020B0502040204020203" pitchFamily="34" charset="-79"/>
                 <a:cs typeface="Gisha" panose="020B0502040204020203" pitchFamily="34" charset="-79"/>
               </a:rPr>
@@ -3626,7 +3631,7 @@
           <a:lstStyle/>
           <a:p>
             <a:r>
-              <a:rPr lang="en-US" b="1" dirty="0">
+              <a:rPr lang="en-US" dirty="0">
                 <a:latin typeface="Caveat" pitchFamily="2" charset="0"/>
               </a:rPr>
               <a:t>3D Motion Reconstruction</a:t>
@@ -3648,8 +3653,8 @@
         </p:nvSpPr>
         <p:spPr>
           <a:xfrm>
-            <a:off x="725915" y="4086660"/>
-            <a:ext cx="2468304" cy="369332"/>
+            <a:off x="1358068" y="4086660"/>
+            <a:ext cx="1837939" cy="307777"/>
           </a:xfrm>
           <a:prstGeom prst="rect">
             <a:avLst/>
@@ -3663,7 +3668,7 @@
           <a:lstStyle/>
           <a:p>
             <a:r>
-              <a:rPr lang="en-US" b="1" dirty="0">
+              <a:rPr lang="en-US" sz="1400" dirty="0">
                 <a:latin typeface="Gisha" panose="020B0502040204020203" pitchFamily="34" charset="-79"/>
                 <a:cs typeface="Gisha" panose="020B0502040204020203" pitchFamily="34" charset="-79"/>
               </a:rPr>
@@ -3702,7 +3707,7 @@
           <a:p>
             <a:pPr algn="ctr"/>
             <a:r>
-              <a:rPr lang="en-US" b="1" dirty="0">
+              <a:rPr lang="en-US" dirty="0">
                 <a:latin typeface="Caveat" pitchFamily="2" charset="0"/>
               </a:rPr>
               <a:t>3D Motion Synthesis</a:t>
@@ -3739,7 +3744,7 @@
           <a:lstStyle/>
           <a:p>
             <a:r>
-              <a:rPr lang="en-US" b="1" dirty="0">
+              <a:rPr lang="en-US" dirty="0">
                 <a:latin typeface="Caveat" pitchFamily="2" charset="0"/>
               </a:rPr>
               <a:t>Conditional Image Generation</a:t>
@@ -3801,7 +3806,7 @@
           <a:lstStyle/>
           <a:p>
             <a:pPr algn="ctr"/>
-            <a:endParaRPr lang="en-US" b="1">
+            <a:endParaRPr lang="en-US">
               <a:latin typeface="Caveat" pitchFamily="2" charset="0"/>
             </a:endParaRPr>
           </a:p>
@@ -3863,7 +3868,7 @@
           <a:lstStyle/>
           <a:p>
             <a:pPr algn="ctr"/>
-            <a:endParaRPr lang="en-US" b="1" dirty="0">
+            <a:endParaRPr lang="en-US" dirty="0">
               <a:solidFill>
                 <a:schemeClr val="tx1"/>
               </a:solidFill>
@@ -3928,7 +3933,7 @@
           <a:lstStyle/>
           <a:p>
             <a:pPr algn="ctr"/>
-            <a:endParaRPr lang="en-US" b="1" dirty="0">
+            <a:endParaRPr lang="en-US" dirty="0">
               <a:solidFill>
                 <a:schemeClr val="tx1"/>
               </a:solidFill>
@@ -3993,7 +3998,7 @@
           <a:lstStyle/>
           <a:p>
             <a:pPr algn="ctr"/>
-            <a:endParaRPr lang="en-US" b="1" dirty="0">
+            <a:endParaRPr lang="en-US" dirty="0">
               <a:solidFill>
                 <a:schemeClr val="tx1"/>
               </a:solidFill>
@@ -4058,7 +4063,7 @@
           <a:lstStyle/>
           <a:p>
             <a:pPr algn="ctr"/>
-            <a:endParaRPr lang="en-US" b="1" dirty="0">
+            <a:endParaRPr lang="en-US" dirty="0">
               <a:solidFill>
                 <a:schemeClr val="tx1"/>
               </a:solidFill>
@@ -4121,7 +4126,7 @@
           <a:lstStyle/>
           <a:p>
             <a:pPr algn="ctr"/>
-            <a:endParaRPr lang="en-US" b="1">
+            <a:endParaRPr lang="en-US">
               <a:latin typeface="Caveat" pitchFamily="2" charset="0"/>
             </a:endParaRPr>
           </a:p>
@@ -4183,7 +4188,7 @@
           <a:lstStyle/>
           <a:p>
             <a:pPr algn="ctr"/>
-            <a:endParaRPr lang="en-US" b="1" dirty="0">
+            <a:endParaRPr lang="en-US" dirty="0">
               <a:solidFill>
                 <a:schemeClr val="tx1"/>
               </a:solidFill>
@@ -4248,7 +4253,7 @@
           <a:lstStyle/>
           <a:p>
             <a:pPr algn="ctr"/>
-            <a:endParaRPr lang="en-US" b="1" dirty="0">
+            <a:endParaRPr lang="en-US" dirty="0">
               <a:solidFill>
                 <a:schemeClr val="tx1"/>
               </a:solidFill>
@@ -4313,7 +4318,7 @@
           <a:lstStyle/>
           <a:p>
             <a:pPr algn="ctr"/>
-            <a:endParaRPr lang="en-US" b="1" dirty="0">
+            <a:endParaRPr lang="en-US" dirty="0">
               <a:solidFill>
                 <a:schemeClr val="tx1"/>
               </a:solidFill>
